--- a/dist/초1/수학/수와연산/초1_수학_수와연산_10_받아올림이있는덧셈.pptx
+++ b/dist/초1/수학/수와연산/초1_수학_수와연산_10_받아올림이있는덧셈.pptx
@@ -119,39 +119,39 @@
   <p:extLst>
     <p:ext uri="{521415D9-36F7-43E2-AB2F-B90AF26B5E84}">
       <p14:sectionLst xmlns:p14="http://schemas.microsoft.com/office/powerpoint/2010/main">
-        <p14:section name="도입" id="{7e8fca08-9686-ff96-39c3-8f208ef020e8}">
+        <p14:section name="도입" id="{ac3d39ad-5c9b-0743-13d2-8eee0f311835}">
           <p14:sldIdLst>
             <p14:sldId id="256"/>
             <p14:sldId id="257"/>
           </p14:sldIdLst>
         </p14:section>
-        <p14:section name="개념" id="{59668efe-3ac7-36f6-6761-7416b5e1f101}">
+        <p14:section name="개념" id="{297ca75a-c30c-a151-c55a-98556a685323}">
           <p14:sldIdLst>
             <p14:sldId id="258"/>
             <p14:sldId id="259"/>
             <p14:sldId id="260"/>
           </p14:sldIdLst>
         </p14:section>
-        <p14:section name="연습" id="{4e808371-b934-1c87-0682-11122c37192d}">
+        <p14:section name="연습" id="{24e283af-b7b9-5a7c-26cd-a752aaac0d41}">
           <p14:sldIdLst>
             <p14:sldId id="261"/>
             <p14:sldId id="262"/>
             <p14:sldId id="263"/>
           </p14:sldIdLst>
         </p14:section>
-        <p14:section name="확인" id="{04f53c4b-cc0c-3926-254c-bb2477879026}">
+        <p14:section name="확인" id="{e01a408b-ef2a-def6-8704-5bb338ccbba2}">
           <p14:sldIdLst>
             <p14:sldId id="264"/>
             <p14:sldId id="265"/>
             <p14:sldId id="266"/>
           </p14:sldIdLst>
         </p14:section>
-        <p14:section name="정리" id="{3ae72727-4a06-8330-79fd-12723a264431}">
+        <p14:section name="정리" id="{ca4099e0-c12b-3dbd-f0e6-2695cec66450}">
           <p14:sldIdLst>
             <p14:sldId id="267"/>
           </p14:sldIdLst>
         </p14:section>
-        <p14:section name="보충" id="{d4638a74-ed67-f1f7-0c7c-7964a78d9a75}">
+        <p14:section name="보충" id="{43a940ab-6c8f-0407-612f-b35e8fbce065}">
           <p14:sldIdLst>
             <p14:sldId id="268"/>
           </p14:sldIdLst>

--- a/dist/초1/수학/수와연산/초1_수학_수와연산_10_받아올림이있는덧셈.pptx
+++ b/dist/초1/수학/수와연산/초1_수학_수와연산_10_받아올림이있는덧셈.pptx
@@ -119,39 +119,39 @@
   <p:extLst>
     <p:ext uri="{521415D9-36F7-43E2-AB2F-B90AF26B5E84}">
       <p14:sectionLst xmlns:p14="http://schemas.microsoft.com/office/powerpoint/2010/main">
-        <p14:section name="도입" id="{ac3d39ad-5c9b-0743-13d2-8eee0f311835}">
+        <p14:section name="도입" id="{a6bf06f2-ae1c-2932-f755-926dc0901929}">
           <p14:sldIdLst>
             <p14:sldId id="256"/>
             <p14:sldId id="257"/>
           </p14:sldIdLst>
         </p14:section>
-        <p14:section name="개념" id="{297ca75a-c30c-a151-c55a-98556a685323}">
+        <p14:section name="개념" id="{83ea385b-32a5-8e3b-9e58-322814691198}">
           <p14:sldIdLst>
             <p14:sldId id="258"/>
             <p14:sldId id="259"/>
             <p14:sldId id="260"/>
           </p14:sldIdLst>
         </p14:section>
-        <p14:section name="연습" id="{24e283af-b7b9-5a7c-26cd-a752aaac0d41}">
+        <p14:section name="연습" id="{701167a8-a074-d0f4-e746-c2bc70b1c81c}">
           <p14:sldIdLst>
             <p14:sldId id="261"/>
             <p14:sldId id="262"/>
             <p14:sldId id="263"/>
           </p14:sldIdLst>
         </p14:section>
-        <p14:section name="확인" id="{e01a408b-ef2a-def6-8704-5bb338ccbba2}">
+        <p14:section name="확인" id="{8f1fbc58-cccc-4669-9504-3836f4d2bf53}">
           <p14:sldIdLst>
             <p14:sldId id="264"/>
             <p14:sldId id="265"/>
             <p14:sldId id="266"/>
           </p14:sldIdLst>
         </p14:section>
-        <p14:section name="정리" id="{ca4099e0-c12b-3dbd-f0e6-2695cec66450}">
+        <p14:section name="정리" id="{413c4ba2-e5d9-545c-3663-e2ded6fd92fb}">
           <p14:sldIdLst>
             <p14:sldId id="267"/>
           </p14:sldIdLst>
         </p14:section>
-        <p14:section name="보충" id="{43a940ab-6c8f-0407-612f-b35e8fbce065}">
+        <p14:section name="보충" id="{e2094ba2-66d5-b518-b6a0-2e24e8a3045b}">
           <p14:sldIdLst>
             <p14:sldId id="268"/>
           </p14:sldIdLst>
@@ -6909,7 +6909,7 @@
         </p:nvSpPr>
         <p:spPr>
           <a:xfrm>
-            <a:off x="548640" y="3465576"/>
+            <a:off x="548640" y="3488436"/>
             <a:ext cx="566928" cy="566928"/>
           </a:xfrm>
           <a:prstGeom prst="roundRect">
@@ -6956,8 +6956,8 @@
         </p:nvSpPr>
         <p:spPr>
           <a:xfrm flipH="1" flipV="1">
-            <a:off x="2593848" y="3627120"/>
-            <a:ext cx="853440" cy="243840"/>
+            <a:off x="3207258" y="3646170"/>
+            <a:ext cx="880110" cy="251460"/>
           </a:xfrm>
           <a:prstGeom prst="line">
             <a:avLst/>
@@ -6979,8 +6979,8 @@
         </p:nvSpPr>
         <p:spPr>
           <a:xfrm flipV="1">
-            <a:off x="3447288" y="3627120"/>
-            <a:ext cx="853440" cy="243840"/>
+            <a:off x="4087368" y="3646170"/>
+            <a:ext cx="880110" cy="251460"/>
           </a:xfrm>
           <a:prstGeom prst="line">
             <a:avLst/>
@@ -7002,8 +7002,8 @@
         </p:nvSpPr>
         <p:spPr>
           <a:xfrm>
-            <a:off x="3142488" y="3870960"/>
-            <a:ext cx="609600" cy="609600"/>
+            <a:off x="3773043" y="3897630"/>
+            <a:ext cx="628650" cy="628650"/>
           </a:xfrm>
           <a:prstGeom prst="ellipse">
             <a:avLst/>
@@ -7025,7 +7025,7 @@
             <a:pPr eaLnBrk="0" algn="ctr" indent="0" marL="0">
               <a:buNone/>
             </a:pPr>
-            <a:endParaRPr lang="ko-KR" sz="2400" dirty="0"/>
+            <a:endParaRPr lang="ko-KR" sz="2500" dirty="0"/>
           </a:p>
         </p:txBody>
       </p:sp>
@@ -7037,8 +7037,8 @@
         </p:nvSpPr>
         <p:spPr>
           <a:xfrm>
-            <a:off x="2289048" y="3017520"/>
-            <a:ext cx="609600" cy="609600"/>
+            <a:off x="2892933" y="3017520"/>
+            <a:ext cx="628650" cy="628650"/>
           </a:xfrm>
           <a:prstGeom prst="ellipse">
             <a:avLst/>
@@ -7061,7 +7061,7 @@
               <a:buNone/>
             </a:pPr>
             <a:r>
-              <a:rPr lang="ko-KR" altLang="en-US" sz="2400" b="1" dirty="0">
+              <a:rPr lang="ko-KR" altLang="en-US" sz="2500" b="1" dirty="0">
                 <a:solidFill>
                   <a:srgbClr val="1F2937"/>
                 </a:solidFill>
@@ -7071,7 +7071,7 @@
               </a:rPr>
               <a:t>10</a:t>
             </a:r>
-            <a:endParaRPr lang="ko-KR" sz="2400" dirty="0"/>
+            <a:endParaRPr lang="ko-KR" sz="2500" dirty="0"/>
           </a:p>
         </p:txBody>
       </p:sp>
@@ -7083,8 +7083,8 @@
         </p:nvSpPr>
         <p:spPr>
           <a:xfrm>
-            <a:off x="3995928" y="3017520"/>
-            <a:ext cx="609600" cy="609600"/>
+            <a:off x="4653153" y="3017520"/>
+            <a:ext cx="628650" cy="628650"/>
           </a:xfrm>
           <a:prstGeom prst="ellipse">
             <a:avLst/>
@@ -7107,7 +7107,7 @@
               <a:buNone/>
             </a:pPr>
             <a:r>
-              <a:rPr lang="ko-KR" altLang="en-US" sz="2400" b="1" dirty="0">
+              <a:rPr lang="ko-KR" altLang="en-US" sz="2500" b="1" dirty="0">
                 <a:solidFill>
                   <a:srgbClr val="1F2937"/>
                 </a:solidFill>
@@ -7117,7 +7117,7 @@
               </a:rPr>
               <a:t>4</a:t>
             </a:r>
-            <a:endParaRPr lang="ko-KR" sz="2400" dirty="0"/>
+            <a:endParaRPr lang="ko-KR" sz="2500" dirty="0"/>
           </a:p>
         </p:txBody>
       </p:sp>
@@ -7129,7 +7129,7 @@
         </p:nvSpPr>
         <p:spPr>
           <a:xfrm>
-            <a:off x="548640" y="5157216"/>
+            <a:off x="548640" y="5180076"/>
             <a:ext cx="566928" cy="566928"/>
           </a:xfrm>
           <a:prstGeom prst="roundRect">
@@ -7176,8 +7176,8 @@
         </p:nvSpPr>
         <p:spPr>
           <a:xfrm flipH="1">
-            <a:off x="2593848" y="5318760"/>
-            <a:ext cx="853440" cy="243840"/>
+            <a:off x="3207258" y="5337810"/>
+            <a:ext cx="880110" cy="251460"/>
           </a:xfrm>
           <a:prstGeom prst="line">
             <a:avLst/>
@@ -7199,8 +7199,8 @@
         </p:nvSpPr>
         <p:spPr>
           <a:xfrm>
-            <a:off x="3447288" y="5318760"/>
-            <a:ext cx="853440" cy="243840"/>
+            <a:off x="4087368" y="5337810"/>
+            <a:ext cx="880110" cy="251460"/>
           </a:xfrm>
           <a:prstGeom prst="line">
             <a:avLst/>
@@ -7222,8 +7222,8 @@
         </p:nvSpPr>
         <p:spPr>
           <a:xfrm>
-            <a:off x="3142488" y="4709160"/>
-            <a:ext cx="609600" cy="609600"/>
+            <a:off x="3773043" y="4709160"/>
+            <a:ext cx="628650" cy="628650"/>
           </a:xfrm>
           <a:prstGeom prst="ellipse">
             <a:avLst/>
@@ -7246,7 +7246,7 @@
               <a:buNone/>
             </a:pPr>
             <a:r>
-              <a:rPr lang="ko-KR" altLang="en-US" sz="2400" b="1" dirty="0">
+              <a:rPr lang="ko-KR" altLang="en-US" sz="2500" b="1" dirty="0">
                 <a:solidFill>
                   <a:srgbClr val="1F2937"/>
                 </a:solidFill>
@@ -7256,7 +7256,7 @@
               </a:rPr>
               <a:t>6</a:t>
             </a:r>
-            <a:endParaRPr lang="ko-KR" sz="2400" dirty="0"/>
+            <a:endParaRPr lang="ko-KR" sz="2500" dirty="0"/>
           </a:p>
         </p:txBody>
       </p:sp>
@@ -7268,8 +7268,8 @@
         </p:nvSpPr>
         <p:spPr>
           <a:xfrm>
-            <a:off x="2289048" y="5562600"/>
-            <a:ext cx="609600" cy="609600"/>
+            <a:off x="2892933" y="5589270"/>
+            <a:ext cx="628650" cy="628650"/>
           </a:xfrm>
           <a:prstGeom prst="ellipse">
             <a:avLst/>
@@ -7292,7 +7292,7 @@
               <a:buNone/>
             </a:pPr>
             <a:r>
-              <a:rPr lang="ko-KR" altLang="en-US" sz="2400" b="1" dirty="0">
+              <a:rPr lang="ko-KR" altLang="en-US" sz="2500" b="1" dirty="0">
                 <a:solidFill>
                   <a:srgbClr val="1F2937"/>
                 </a:solidFill>
@@ -7302,7 +7302,7 @@
               </a:rPr>
               <a:t>2</a:t>
             </a:r>
-            <a:endParaRPr lang="ko-KR" sz="2400" dirty="0"/>
+            <a:endParaRPr lang="ko-KR" sz="2500" dirty="0"/>
           </a:p>
         </p:txBody>
       </p:sp>
@@ -7314,8 +7314,8 @@
         </p:nvSpPr>
         <p:spPr>
           <a:xfrm>
-            <a:off x="3995928" y="5562600"/>
-            <a:ext cx="609600" cy="609600"/>
+            <a:off x="4653153" y="5589270"/>
+            <a:ext cx="628650" cy="628650"/>
           </a:xfrm>
           <a:prstGeom prst="ellipse">
             <a:avLst/>
@@ -7337,7 +7337,7 @@
             <a:pPr eaLnBrk="0" algn="ctr" indent="0" marL="0">
               <a:buNone/>
             </a:pPr>
-            <a:endParaRPr lang="ko-KR" sz="2400" dirty="0"/>
+            <a:endParaRPr lang="ko-KR" sz="2500" dirty="0"/>
           </a:p>
         </p:txBody>
       </p:sp>

--- a/dist/초1/수학/수와연산/초1_수학_수와연산_10_받아올림이있는덧셈.pptx
+++ b/dist/초1/수학/수와연산/초1_수학_수와연산_10_받아올림이있는덧셈.pptx
@@ -119,39 +119,39 @@
   <p:extLst>
     <p:ext uri="{521415D9-36F7-43E2-AB2F-B90AF26B5E84}">
       <p14:sectionLst xmlns:p14="http://schemas.microsoft.com/office/powerpoint/2010/main">
-        <p14:section name="도입" id="{a6bf06f2-ae1c-2932-f755-926dc0901929}">
+        <p14:section name="도입" id="{f4a1dc52-afcb-0bce-fd27-384b0375b3b6}">
           <p14:sldIdLst>
             <p14:sldId id="256"/>
             <p14:sldId id="257"/>
           </p14:sldIdLst>
         </p14:section>
-        <p14:section name="개념" id="{83ea385b-32a5-8e3b-9e58-322814691198}">
+        <p14:section name="개념" id="{1d1a3765-324f-578c-8bf0-217f175b90a7}">
           <p14:sldIdLst>
             <p14:sldId id="258"/>
             <p14:sldId id="259"/>
             <p14:sldId id="260"/>
           </p14:sldIdLst>
         </p14:section>
-        <p14:section name="연습" id="{701167a8-a074-d0f4-e746-c2bc70b1c81c}">
+        <p14:section name="연습" id="{50fcf58c-0598-7cda-5bd5-8336e0def9da}">
           <p14:sldIdLst>
             <p14:sldId id="261"/>
             <p14:sldId id="262"/>
             <p14:sldId id="263"/>
           </p14:sldIdLst>
         </p14:section>
-        <p14:section name="확인" id="{8f1fbc58-cccc-4669-9504-3836f4d2bf53}">
+        <p14:section name="확인" id="{54441909-aba5-e15b-1c65-bf0d54c894af}">
           <p14:sldIdLst>
             <p14:sldId id="264"/>
             <p14:sldId id="265"/>
             <p14:sldId id="266"/>
           </p14:sldIdLst>
         </p14:section>
-        <p14:section name="정리" id="{413c4ba2-e5d9-545c-3663-e2ded6fd92fb}">
+        <p14:section name="정리" id="{c682692a-1238-dd4f-0bc2-18938a31ab84}">
           <p14:sldIdLst>
             <p14:sldId id="267"/>
           </p14:sldIdLst>
         </p14:section>
-        <p14:section name="보충" id="{e2094ba2-66d5-b518-b6a0-2e24e8a3045b}">
+        <p14:section name="보충" id="{0b8c5664-25eb-86b8-9fef-c56f6a539fca}">
           <p14:sldIdLst>
             <p14:sldId id="268"/>
           </p14:sldIdLst>
